--- a/m7/diapositivos/sessao-14-m7-f10.pptx
+++ b/m7/diapositivos/sessao-14-m7-f10.pptx
@@ -1884,7 +1884,75 @@
                 <a:ea typeface="Georgia" pitchFamily="34" charset="-122"/>
                 <a:cs typeface="Georgia" pitchFamily="34" charset="-120"/>
               </a:rPr>
-              <a:t>Hoje fechas a entrega: documentas o processo no caderno, escreves a memória descritiva e preparas a defesa oral (três minutos e perguntas). Cada verso usado leva a referência do Arquivo Pessoa.</a:t>
+              <a:t>Hoje fechas a entrega: documentas o processo no caderno, escreves a </a:t>
+            </a:r>
+            <a:pPr indent="0" marL="0">
+              <a:lnSpc>
+                <a:spcPct val="120000"/>
+              </a:lnSpc>
+              <a:buNone/>
+            </a:pPr>
+            <a:r>
+              <a:rPr lang="en-US" sz="2300" b="1" dirty="0">
+                <a:solidFill>
+                  <a:srgbClr val="F2F0EA"/>
+                </a:solidFill>
+                <a:latin typeface="Georgia" pitchFamily="34" charset="0"/>
+                <a:ea typeface="Georgia" pitchFamily="34" charset="-122"/>
+                <a:cs typeface="Georgia" pitchFamily="34" charset="-120"/>
+              </a:rPr>
+              <a:t>memória descritiva</a:t>
+            </a:r>
+            <a:pPr indent="0" marL="0">
+              <a:lnSpc>
+                <a:spcPct val="120000"/>
+              </a:lnSpc>
+              <a:buNone/>
+            </a:pPr>
+            <a:r>
+              <a:rPr lang="en-US" sz="2300" dirty="0">
+                <a:solidFill>
+                  <a:srgbClr val="F2F0EA"/>
+                </a:solidFill>
+                <a:latin typeface="Georgia" pitchFamily="34" charset="0"/>
+                <a:ea typeface="Georgia" pitchFamily="34" charset="-122"/>
+                <a:cs typeface="Georgia" pitchFamily="34" charset="-120"/>
+              </a:rPr>
+              <a:t> e preparas a </a:t>
+            </a:r>
+            <a:pPr indent="0" marL="0">
+              <a:lnSpc>
+                <a:spcPct val="120000"/>
+              </a:lnSpc>
+              <a:buNone/>
+            </a:pPr>
+            <a:r>
+              <a:rPr lang="en-US" sz="2300" b="1" dirty="0">
+                <a:solidFill>
+                  <a:srgbClr val="F2F0EA"/>
+                </a:solidFill>
+                <a:latin typeface="Georgia" pitchFamily="34" charset="0"/>
+                <a:ea typeface="Georgia" pitchFamily="34" charset="-122"/>
+                <a:cs typeface="Georgia" pitchFamily="34" charset="-120"/>
+              </a:rPr>
+              <a:t>defesa oral</a:t>
+            </a:r>
+            <a:pPr indent="0" marL="0">
+              <a:lnSpc>
+                <a:spcPct val="120000"/>
+              </a:lnSpc>
+              <a:buNone/>
+            </a:pPr>
+            <a:r>
+              <a:rPr lang="en-US" sz="2300" dirty="0">
+                <a:solidFill>
+                  <a:srgbClr val="F2F0EA"/>
+                </a:solidFill>
+                <a:latin typeface="Georgia" pitchFamily="34" charset="0"/>
+                <a:ea typeface="Georgia" pitchFamily="34" charset="-122"/>
+                <a:cs typeface="Georgia" pitchFamily="34" charset="-120"/>
+              </a:rPr>
+              <a:t> (três minutos e perguntas). Cada verso usado leva a referência do Arquivo Pessoa.</a:t>
             </a:r>
             <a:endParaRPr lang="en-US" sz="2300" dirty="0"/>
           </a:p>
@@ -2291,7 +2359,41 @@
                 <a:ea typeface="Arial" pitchFamily="34" charset="-122"/>
                 <a:cs typeface="Arial" pitchFamily="34" charset="-120"/>
               </a:rPr>
-              <a:t>O projeto do Dia Pessoa vale 25 % do módulo: um objeto (vídeo, som, cartaz, performance, instalação) a partir de textos de Pessoa lidos no módulo.</a:t>
+              <a:t>O projeto do Dia Pessoa vale 25 % do módulo: um objeto (vídeo, som, cartaz, </a:t>
+            </a:r>
+            <a:pPr indent="0" marL="0">
+              <a:lnSpc>
+                <a:spcPct val="105000"/>
+              </a:lnSpc>
+              <a:buNone/>
+            </a:pPr>
+            <a:r>
+              <a:rPr lang="en-US" sz="2200" i="1" dirty="0">
+                <a:solidFill>
+                  <a:srgbClr val="F2F0EA"/>
+                </a:solidFill>
+                <a:latin typeface="Arial" pitchFamily="34" charset="0"/>
+                <a:ea typeface="Arial" pitchFamily="34" charset="-122"/>
+                <a:cs typeface="Arial" pitchFamily="34" charset="-120"/>
+              </a:rPr>
+              <a:t>performance</a:t>
+            </a:r>
+            <a:pPr indent="0" marL="0">
+              <a:lnSpc>
+                <a:spcPct val="105000"/>
+              </a:lnSpc>
+              <a:buNone/>
+            </a:pPr>
+            <a:r>
+              <a:rPr lang="en-US" sz="2200" dirty="0">
+                <a:solidFill>
+                  <a:srgbClr val="F2F0EA"/>
+                </a:solidFill>
+                <a:latin typeface="Arial" pitchFamily="34" charset="0"/>
+                <a:ea typeface="Arial" pitchFamily="34" charset="-122"/>
+                <a:cs typeface="Arial" pitchFamily="34" charset="-120"/>
+              </a:rPr>
+              <a:t>, instalação) a partir de textos de Pessoa lidos no módulo.</a:t>
             </a:r>
             <a:endParaRPr lang="en-US" sz="2200" dirty="0"/>
           </a:p>
